--- a/Project/Forecasting & Predictive Modeling/Headcount Attrition - Survival Analysis/result/slides/Executive_Attrition_Report_20260830.pptx
+++ b/Project/Forecasting & Predictive Modeling/Headcount Attrition - Survival Analysis/result/slides/Executive_Attrition_Report_20260830.pptx
@@ -4563,14 +4563,14 @@
                   <a:srgbClr val="6B7C8C"/>
                 </a:solidFill>
               </a:rPr>
-              <a:t>COEFFICIENT PLOT</a:t>
+              <a:t>HAZARD RATIO PLOT</a:t>
             </a:r>
           </a:p>
         </p:txBody>
       </p:sp>
       <p:pic>
         <p:nvPicPr>
-          <p:cNvPr id="10" name="Picture 9" descr="cox_hazard_ratios.png"/>
+          <p:cNvPr id="10" name="Picture 9" descr="hazard_ratio_barplot.png"/>
           <p:cNvPicPr>
             <a:picLocks noChangeAspect="1"/>
           </p:cNvPicPr>
@@ -4585,7 +4585,7 @@
         <p:spPr>
           <a:xfrm>
             <a:off x="457200" y="1755648"/>
-            <a:ext cx="5029200" cy="3771900"/>
+            <a:ext cx="5029200" cy="3352800"/>
           </a:xfrm>
           <a:prstGeom prst="rect">
             <a:avLst/>
@@ -4898,7 +4898,7 @@
                   <a:srgbClr val="8A98A5"/>
                 </a:solidFill>
               </a:rPr>
-              <a:t>Hazard ratio above 1.0 raises resignation risk; below 1.0 lowers it. Forest plot shows 95% confidence intervals.</a:t>
+              <a:t>Hazard ratio above 1.0 raises resignation risk (red); below 1.0 lowers it (green). 1.0 = no effect.</a:t>
             </a:r>
           </a:p>
         </p:txBody>
